--- a/submit/02_TeaWindow_Pitch_CN_14p.pptx
+++ b/submit/02_TeaWindow_Pitch_CN_14p.pptx
@@ -11,7 +11,7 @@
   </p:notesMasterIdLst>
   <p:sldIdLst>
     <p:sldId id="256" r:id="rId4"/>
-    <p:sldId id="269" r:id="rId22"/>
+    <p:sldId id="268" r:id="rId21"/>
     <p:sldId id="257" r:id="rId5"/>
     <p:sldId id="258" r:id="rId6"/>
     <p:sldId id="259" r:id="rId7"/>
@@ -23,7 +23,7 @@
     <p:sldId id="265" r:id="rId13"/>
     <p:sldId id="266" r:id="rId14"/>
     <p:sldId id="267" r:id="rId15"/>
-    <p:sldId id="268" r:id="rId21"/>
+    <p:sldId id="269" r:id="rId22"/>
   </p:sldIdLst>
   <p:sldSz cx="12179300" cy="6858000"/>
   <p:notesSz cx="6858000" cy="9144000"/>
@@ -21940,30 +21940,735 @@
         <p:nvPr/>
       </p:nvGrpSpPr>
       <p:grpSpPr/>
-      <p:pic>
-        <p:nvPicPr>
-          <p:cNvPr id="2" name="Picture 1" descr="30_架构图_1plus5.png"/>
-          <p:cNvPicPr>
-            <a:picLocks noChangeAspect="1"/>
-          </p:cNvPicPr>
+      <p:sp>
+        <p:nvSpPr>
+          <p:cNvPr id="2" name="Rectangle 1"/>
+          <p:cNvSpPr/>
           <p:nvPr/>
-        </p:nvPicPr>
-        <p:blipFill>
-          <a:blip r:embed="rId2"/>
-          <a:stretch>
-            <a:fillRect/>
-          </a:stretch>
-        </p:blipFill>
+        </p:nvSpPr>
         <p:spPr>
           <a:xfrm>
             <a:off x="0" y="0"/>
-            <a:ext cx="12179300" cy="6858000"/>
-          </a:xfrm>
-          <a:prstGeom prst="rect">
-            <a:avLst/>
-          </a:prstGeom>
-        </p:spPr>
-      </p:pic>
+            <a:ext cx="12179808" cy="6858000"/>
+          </a:xfrm>
+          <a:prstGeom prst="rect">
+            <a:avLst/>
+          </a:prstGeom>
+          <a:solidFill>
+            <a:srgbClr val="0F1720"/>
+          </a:solidFill>
+          <a:ln>
+            <a:noFill/>
+          </a:ln>
+          <a:effectLst/>
+        </p:spPr>
+        <p:style>
+          <a:lnRef idx="1">
+            <a:schemeClr val="accent1"/>
+          </a:lnRef>
+          <a:fillRef idx="3">
+            <a:schemeClr val="accent1"/>
+          </a:fillRef>
+          <a:effectRef idx="2">
+            <a:schemeClr val="accent1"/>
+          </a:effectRef>
+          <a:fontRef idx="minor">
+            <a:schemeClr val="lt1"/>
+          </a:fontRef>
+        </p:style>
+        <p:txBody>
+          <a:bodyPr rtlCol="0" anchor="ctr"/>
+          <a:lstStyle/>
+          <a:p>
+            <a:pPr algn="ctr"/>
+          </a:p>
+        </p:txBody>
+      </p:sp>
+      <p:sp>
+        <p:nvSpPr>
+          <p:cNvPr id="3" name="Rectangle 2"/>
+          <p:cNvSpPr/>
+          <p:nvPr/>
+        </p:nvSpPr>
+        <p:spPr>
+          <a:xfrm>
+            <a:off x="640080" y="658368"/>
+            <a:ext cx="64008" cy="777240"/>
+          </a:xfrm>
+          <a:prstGeom prst="rect">
+            <a:avLst/>
+          </a:prstGeom>
+          <a:solidFill>
+            <a:srgbClr val="4AA8FF"/>
+          </a:solidFill>
+          <a:ln>
+            <a:noFill/>
+          </a:ln>
+          <a:effectLst/>
+        </p:spPr>
+        <p:style>
+          <a:lnRef idx="1">
+            <a:schemeClr val="accent1"/>
+          </a:lnRef>
+          <a:fillRef idx="3">
+            <a:schemeClr val="accent1"/>
+          </a:fillRef>
+          <a:effectRef idx="2">
+            <a:schemeClr val="accent1"/>
+          </a:effectRef>
+          <a:fontRef idx="minor">
+            <a:schemeClr val="lt1"/>
+          </a:fontRef>
+        </p:style>
+        <p:txBody>
+          <a:bodyPr rtlCol="0" anchor="ctr"/>
+          <a:lstStyle/>
+          <a:p>
+            <a:pPr algn="ctr"/>
+          </a:p>
+        </p:txBody>
+      </p:sp>
+      <p:sp>
+        <p:nvSpPr>
+          <p:cNvPr id="4" name="TextBox 3"/>
+          <p:cNvSpPr txBox="1"/>
+          <p:nvPr/>
+        </p:nvSpPr>
+        <p:spPr>
+          <a:xfrm>
+            <a:off x="868680" y="621792"/>
+            <a:ext cx="8229600" cy="640080"/>
+          </a:xfrm>
+          <a:prstGeom prst="rect">
+            <a:avLst/>
+          </a:prstGeom>
+          <a:noFill/>
+        </p:spPr>
+        <p:txBody>
+          <a:bodyPr wrap="square">
+            <a:spAutoFit/>
+          </a:bodyPr>
+          <a:lstStyle/>
+          <a:p>
+            <a:pPr algn="l"/>
+            <a:r>
+              <a:rPr sz="3000" b="1" i="0">
+                <a:solidFill>
+                  <a:srgbClr val="E8EEF3"/>
+                </a:solidFill>
+                <a:latin typeface="Montserrat"/>
+              </a:rPr>
+              <a:t>团队与背景</a:t>
+            </a:r>
+          </a:p>
+        </p:txBody>
+      </p:sp>
+      <p:sp>
+        <p:nvSpPr>
+          <p:cNvPr id="5" name="TextBox 4"/>
+          <p:cNvSpPr txBox="1"/>
+          <p:nvPr/>
+        </p:nvSpPr>
+        <p:spPr>
+          <a:xfrm>
+            <a:off x="868680" y="1481328"/>
+            <a:ext cx="5486400" cy="731520"/>
+          </a:xfrm>
+          <a:prstGeom prst="rect">
+            <a:avLst/>
+          </a:prstGeom>
+          <a:noFill/>
+        </p:spPr>
+        <p:txBody>
+          <a:bodyPr wrap="square">
+            <a:spAutoFit/>
+          </a:bodyPr>
+          <a:lstStyle/>
+          <a:p>
+            <a:pPr algn="l"/>
+            <a:r>
+              <a:rPr sz="4000" b="1" i="0">
+                <a:solidFill>
+                  <a:srgbClr val="E8EEF3"/>
+                </a:solidFill>
+                <a:latin typeface="Montserrat"/>
+              </a:rPr>
+              <a:t>叶子玄</a:t>
+            </a:r>
+          </a:p>
+        </p:txBody>
+      </p:sp>
+      <p:sp>
+        <p:nvSpPr>
+          <p:cNvPr id="6" name="TextBox 5"/>
+          <p:cNvSpPr txBox="1"/>
+          <p:nvPr/>
+        </p:nvSpPr>
+        <p:spPr>
+          <a:xfrm>
+            <a:off x="868680" y="2148840"/>
+            <a:ext cx="5486400" cy="365760"/>
+          </a:xfrm>
+          <a:prstGeom prst="rect">
+            <a:avLst/>
+          </a:prstGeom>
+          <a:noFill/>
+        </p:spPr>
+        <p:txBody>
+          <a:bodyPr wrap="square">
+            <a:spAutoFit/>
+          </a:bodyPr>
+          <a:lstStyle/>
+          <a:p>
+            <a:pPr algn="l"/>
+            <a:r>
+              <a:rPr sz="1800" b="0" i="0">
+                <a:solidFill>
+                  <a:srgbClr val="9FB4C6"/>
+                </a:solidFill>
+                <a:latin typeface="Montserrat"/>
+              </a:rPr>
+              <a:t>Ye Zixuan</a:t>
+            </a:r>
+          </a:p>
+        </p:txBody>
+      </p:sp>
+      <p:sp>
+        <p:nvSpPr>
+          <p:cNvPr id="7" name="TextBox 6"/>
+          <p:cNvSpPr txBox="1"/>
+          <p:nvPr/>
+        </p:nvSpPr>
+        <p:spPr>
+          <a:xfrm>
+            <a:off x="868680" y="2606040"/>
+            <a:ext cx="5669280" cy="457200"/>
+          </a:xfrm>
+          <a:prstGeom prst="rect">
+            <a:avLst/>
+          </a:prstGeom>
+          <a:noFill/>
+        </p:spPr>
+        <p:txBody>
+          <a:bodyPr wrap="square">
+            <a:spAutoFit/>
+          </a:bodyPr>
+          <a:lstStyle/>
+          <a:p>
+            <a:pPr algn="l"/>
+            <a:r>
+              <a:rPr sz="1600" b="0" i="0">
+                <a:solidFill>
+                  <a:srgbClr val="CED9E4"/>
+                </a:solidFill>
+                <a:latin typeface="Inter"/>
+              </a:rPr>
+              <a:t>浙江大学 · 计算机科学与技术（本科二年级）</a:t>
+            </a:r>
+          </a:p>
+        </p:txBody>
+      </p:sp>
+      <p:sp>
+        <p:nvSpPr>
+          <p:cNvPr id="8" name="TextBox 7"/>
+          <p:cNvSpPr txBox="1"/>
+          <p:nvPr/>
+        </p:nvSpPr>
+        <p:spPr>
+          <a:xfrm>
+            <a:off x="868680" y="3200400"/>
+            <a:ext cx="5669280" cy="365760"/>
+          </a:xfrm>
+          <a:prstGeom prst="rect">
+            <a:avLst/>
+          </a:prstGeom>
+          <a:noFill/>
+        </p:spPr>
+        <p:txBody>
+          <a:bodyPr wrap="square">
+            <a:spAutoFit/>
+          </a:bodyPr>
+          <a:lstStyle/>
+          <a:p>
+            <a:pPr algn="l"/>
+            <a:r>
+              <a:rPr sz="1350" b="0" i="0">
+                <a:solidFill>
+                  <a:srgbClr val="CED9E4"/>
+                </a:solidFill>
+                <a:latin typeface="Inter"/>
+              </a:rPr>
+              <a:t>角色：项目负责人 · 算法与全栈</a:t>
+            </a:r>
+          </a:p>
+        </p:txBody>
+      </p:sp>
+      <p:sp>
+        <p:nvSpPr>
+          <p:cNvPr id="9" name="TextBox 8"/>
+          <p:cNvSpPr txBox="1"/>
+          <p:nvPr/>
+        </p:nvSpPr>
+        <p:spPr>
+          <a:xfrm>
+            <a:off x="868680" y="3493008"/>
+            <a:ext cx="5669280" cy="365760"/>
+          </a:xfrm>
+          <a:prstGeom prst="rect">
+            <a:avLst/>
+          </a:prstGeom>
+          <a:noFill/>
+        </p:spPr>
+        <p:txBody>
+          <a:bodyPr wrap="square">
+            <a:spAutoFit/>
+          </a:bodyPr>
+          <a:lstStyle/>
+          <a:p>
+            <a:pPr algn="l"/>
+            <a:r>
+              <a:rPr sz="1350" b="0" i="0">
+                <a:solidFill>
+                  <a:srgbClr val="CED9E4"/>
+                </a:solidFill>
+                <a:latin typeface="Inter"/>
+              </a:rPr>
+              <a:t>团队：1 人（独立完成）· 19 岁</a:t>
+            </a:r>
+          </a:p>
+        </p:txBody>
+      </p:sp>
+      <p:sp>
+        <p:nvSpPr>
+          <p:cNvPr id="10" name="TextBox 9"/>
+          <p:cNvSpPr txBox="1"/>
+          <p:nvPr/>
+        </p:nvSpPr>
+        <p:spPr>
+          <a:xfrm>
+            <a:off x="868680" y="3785615"/>
+            <a:ext cx="5669280" cy="365760"/>
+          </a:xfrm>
+          <a:prstGeom prst="rect">
+            <a:avLst/>
+          </a:prstGeom>
+          <a:noFill/>
+        </p:spPr>
+        <p:txBody>
+          <a:bodyPr wrap="square">
+            <a:spAutoFit/>
+          </a:bodyPr>
+          <a:lstStyle/>
+          <a:p>
+            <a:pPr algn="l"/>
+            <a:r>
+              <a:rPr sz="1350" b="0" i="0">
+                <a:solidFill>
+                  <a:srgbClr val="CED9E4"/>
+                </a:solidFill>
+                <a:latin typeface="Inter"/>
+              </a:rPr>
+              <a:t>地点：中国 · 杭州</a:t>
+            </a:r>
+          </a:p>
+        </p:txBody>
+      </p:sp>
+      <p:sp>
+        <p:nvSpPr>
+          <p:cNvPr id="11" name="TextBox 10"/>
+          <p:cNvSpPr txBox="1"/>
+          <p:nvPr/>
+        </p:nvSpPr>
+        <p:spPr>
+          <a:xfrm>
+            <a:off x="868680" y="4078224"/>
+            <a:ext cx="5669280" cy="365760"/>
+          </a:xfrm>
+          <a:prstGeom prst="rect">
+            <a:avLst/>
+          </a:prstGeom>
+          <a:noFill/>
+        </p:spPr>
+        <p:txBody>
+          <a:bodyPr wrap="square">
+            <a:spAutoFit/>
+          </a:bodyPr>
+          <a:lstStyle/>
+          <a:p>
+            <a:pPr algn="l"/>
+            <a:r>
+              <a:rPr sz="1350" b="0" i="0">
+                <a:solidFill>
+                  <a:srgbClr val="CED9E4"/>
+                </a:solidFill>
+                <a:latin typeface="Inter"/>
+              </a:rPr>
+              <a:t>电话：+86 15858238044</a:t>
+            </a:r>
+          </a:p>
+        </p:txBody>
+      </p:sp>
+      <p:sp>
+        <p:nvSpPr>
+          <p:cNvPr id="12" name="TextBox 11"/>
+          <p:cNvSpPr txBox="1"/>
+          <p:nvPr/>
+        </p:nvSpPr>
+        <p:spPr>
+          <a:xfrm>
+            <a:off x="868680" y="4370832"/>
+            <a:ext cx="5669280" cy="365760"/>
+          </a:xfrm>
+          <a:prstGeom prst="rect">
+            <a:avLst/>
+          </a:prstGeom>
+          <a:noFill/>
+        </p:spPr>
+        <p:txBody>
+          <a:bodyPr wrap="square">
+            <a:spAutoFit/>
+          </a:bodyPr>
+          <a:lstStyle/>
+          <a:p>
+            <a:pPr algn="l"/>
+            <a:r>
+              <a:rPr sz="1350" b="0" i="0">
+                <a:solidFill>
+                  <a:srgbClr val="CED9E4"/>
+                </a:solidFill>
+                <a:latin typeface="Inter"/>
+              </a:rPr>
+              <a:t>邮箱：2302372846@qq.com</a:t>
+            </a:r>
+          </a:p>
+        </p:txBody>
+      </p:sp>
+      <p:sp>
+        <p:nvSpPr>
+          <p:cNvPr id="13" name="TextBox 12"/>
+          <p:cNvSpPr txBox="1"/>
+          <p:nvPr/>
+        </p:nvSpPr>
+        <p:spPr>
+          <a:xfrm>
+            <a:off x="868680" y="4663440"/>
+            <a:ext cx="5669280" cy="365760"/>
+          </a:xfrm>
+          <a:prstGeom prst="rect">
+            <a:avLst/>
+          </a:prstGeom>
+          <a:noFill/>
+        </p:spPr>
+        <p:txBody>
+          <a:bodyPr wrap="square">
+            <a:spAutoFit/>
+          </a:bodyPr>
+          <a:lstStyle/>
+          <a:p>
+            <a:pPr algn="l"/>
+            <a:r>
+              <a:rPr sz="1350" b="0" i="0">
+                <a:solidFill>
+                  <a:srgbClr val="CED9E4"/>
+                </a:solidFill>
+                <a:latin typeface="Inter"/>
+              </a:rPr>
+              <a:t>赛道：Track 01 · 梅家坞气候智慧茶园</a:t>
+            </a:r>
+          </a:p>
+        </p:txBody>
+      </p:sp>
+      <p:sp>
+        <p:nvSpPr>
+          <p:cNvPr id="14" name="TextBox 13"/>
+          <p:cNvSpPr txBox="1"/>
+          <p:nvPr/>
+        </p:nvSpPr>
+        <p:spPr>
+          <a:xfrm>
+            <a:off x="868680" y="4956048"/>
+            <a:ext cx="5669280" cy="365760"/>
+          </a:xfrm>
+          <a:prstGeom prst="rect">
+            <a:avLst/>
+          </a:prstGeom>
+          <a:noFill/>
+        </p:spPr>
+        <p:txBody>
+          <a:bodyPr wrap="square">
+            <a:spAutoFit/>
+          </a:bodyPr>
+          <a:lstStyle/>
+          <a:p>
+            <a:pPr algn="l"/>
+            <a:r>
+              <a:rPr sz="1350" b="0" i="0">
+                <a:solidFill>
+                  <a:srgbClr val="CED9E4"/>
+                </a:solidFill>
+                <a:latin typeface="Inter"/>
+              </a:rPr>
+              <a:t>GitHub：github.com/Eric2007-sudo</a:t>
+            </a:r>
+          </a:p>
+        </p:txBody>
+      </p:sp>
+      <p:sp>
+        <p:nvSpPr>
+          <p:cNvPr id="15" name="Rectangle 14"/>
+          <p:cNvSpPr/>
+          <p:nvPr/>
+        </p:nvSpPr>
+        <p:spPr>
+          <a:xfrm>
+            <a:off x="6720840" y="1481328"/>
+            <a:ext cx="4800600" cy="3246120"/>
+          </a:xfrm>
+          <a:prstGeom prst="rect">
+            <a:avLst/>
+          </a:prstGeom>
+          <a:solidFill>
+            <a:srgbClr val="16212B"/>
+          </a:solidFill>
+          <a:ln w="9525">
+            <a:solidFill>
+              <a:srgbClr val="2B3D4D"/>
+            </a:solidFill>
+          </a:ln>
+          <a:effectLst/>
+        </p:spPr>
+        <p:style>
+          <a:lnRef idx="1">
+            <a:schemeClr val="accent1"/>
+          </a:lnRef>
+          <a:fillRef idx="3">
+            <a:schemeClr val="accent1"/>
+          </a:fillRef>
+          <a:effectRef idx="2">
+            <a:schemeClr val="accent1"/>
+          </a:effectRef>
+          <a:fontRef idx="minor">
+            <a:schemeClr val="lt1"/>
+          </a:fontRef>
+        </p:style>
+        <p:txBody>
+          <a:bodyPr rtlCol="0" anchor="ctr"/>
+          <a:lstStyle/>
+          <a:p>
+            <a:pPr algn="ctr"/>
+          </a:p>
+        </p:txBody>
+      </p:sp>
+      <p:sp>
+        <p:nvSpPr>
+          <p:cNvPr id="16" name="TextBox 15"/>
+          <p:cNvSpPr txBox="1"/>
+          <p:nvPr/>
+        </p:nvSpPr>
+        <p:spPr>
+          <a:xfrm>
+            <a:off x="6967728" y="1664208"/>
+            <a:ext cx="4389120" cy="365760"/>
+          </a:xfrm>
+          <a:prstGeom prst="rect">
+            <a:avLst/>
+          </a:prstGeom>
+          <a:noFill/>
+        </p:spPr>
+        <p:txBody>
+          <a:bodyPr wrap="square">
+            <a:spAutoFit/>
+          </a:bodyPr>
+          <a:lstStyle/>
+          <a:p>
+            <a:pPr algn="l"/>
+            <a:r>
+              <a:rPr sz="1600" b="1" i="0">
+                <a:solidFill>
+                  <a:srgbClr val="4AA8FF"/>
+                </a:solidFill>
+                <a:latin typeface="Inter"/>
+              </a:rPr>
+              <a:t>我为这个项目做了什么</a:t>
+            </a:r>
+          </a:p>
+        </p:txBody>
+      </p:sp>
+      <p:sp>
+        <p:nvSpPr>
+          <p:cNvPr id="17" name="TextBox 16"/>
+          <p:cNvSpPr txBox="1"/>
+          <p:nvPr/>
+        </p:nvSpPr>
+        <p:spPr>
+          <a:xfrm>
+            <a:off x="6967728" y="2148840"/>
+            <a:ext cx="4343400" cy="777240"/>
+          </a:xfrm>
+          <a:prstGeom prst="rect">
+            <a:avLst/>
+          </a:prstGeom>
+          <a:noFill/>
+        </p:spPr>
+        <p:txBody>
+          <a:bodyPr wrap="square">
+            <a:spAutoFit/>
+          </a:bodyPr>
+          <a:lstStyle/>
+          <a:p>
+            <a:pPr algn="l"/>
+            <a:r>
+              <a:rPr sz="1250" b="0" i="0">
+                <a:solidFill>
+                  <a:srgbClr val="CED9E4"/>
+                </a:solidFill>
+                <a:latin typeface="Inter"/>
+              </a:rPr>
+              <a:t>• 数据：ERA5 / MET Norway 双源、Sentinel-2、30m DEM 地形下推</a:t>
+            </a:r>
+          </a:p>
+        </p:txBody>
+      </p:sp>
+      <p:sp>
+        <p:nvSpPr>
+          <p:cNvPr id="18" name="TextBox 17"/>
+          <p:cNvSpPr txBox="1"/>
+          <p:nvPr/>
+        </p:nvSpPr>
+        <p:spPr>
+          <a:xfrm>
+            <a:off x="6967728" y="2971800"/>
+            <a:ext cx="4343400" cy="777240"/>
+          </a:xfrm>
+          <a:prstGeom prst="rect">
+            <a:avLst/>
+          </a:prstGeom>
+          <a:noFill/>
+        </p:spPr>
+        <p:txBody>
+          <a:bodyPr wrap="square">
+            <a:spAutoFit/>
+          </a:bodyPr>
+          <a:lstStyle/>
+          <a:p>
+            <a:pPr algn="l"/>
+            <a:r>
+              <a:rPr sz="1250" b="0" i="0">
+                <a:solidFill>
+                  <a:srgbClr val="CED9E4"/>
+                </a:solidFill>
+                <a:latin typeface="Inter"/>
+              </a:rPr>
+              <a:t>• 模型：numpy GBDT 复合风险；冻结评估集；官方开采日验证 1.8 天</a:t>
+            </a:r>
+          </a:p>
+        </p:txBody>
+      </p:sp>
+      <p:sp>
+        <p:nvSpPr>
+          <p:cNvPr id="19" name="TextBox 18"/>
+          <p:cNvSpPr txBox="1"/>
+          <p:nvPr/>
+        </p:nvSpPr>
+        <p:spPr>
+          <a:xfrm>
+            <a:off x="6967728" y="3794760"/>
+            <a:ext cx="4343400" cy="777240"/>
+          </a:xfrm>
+          <a:prstGeom prst="rect">
+            <a:avLst/>
+          </a:prstGeom>
+          <a:noFill/>
+        </p:spPr>
+        <p:txBody>
+          <a:bodyPr wrap="square">
+            <a:spAutoFit/>
+          </a:bodyPr>
+          <a:lstStyle/>
+          <a:p>
+            <a:pPr algn="l"/>
+            <a:r>
+              <a:rPr sz="1250" b="0" i="0">
+                <a:solidFill>
+                  <a:srgbClr val="CED9E4"/>
+                </a:solidFill>
+                <a:latin typeface="Inter"/>
+              </a:rPr>
+              <a:t>• 产品：在线 Demo、地块风险图、智能问答与 1+5 护栏、部署与监控</a:t>
+            </a:r>
+          </a:p>
+        </p:txBody>
+      </p:sp>
+      <p:sp>
+        <p:nvSpPr>
+          <p:cNvPr id="20" name="TextBox 19"/>
+          <p:cNvSpPr txBox="1"/>
+          <p:nvPr/>
+        </p:nvSpPr>
+        <p:spPr>
+          <a:xfrm>
+            <a:off x="868680" y="5440680"/>
+            <a:ext cx="10607040" cy="457200"/>
+          </a:xfrm>
+          <a:prstGeom prst="rect">
+            <a:avLst/>
+          </a:prstGeom>
+          <a:noFill/>
+        </p:spPr>
+        <p:txBody>
+          <a:bodyPr wrap="square">
+            <a:spAutoFit/>
+          </a:bodyPr>
+          <a:lstStyle/>
+          <a:p>
+            <a:pPr algn="l"/>
+            <a:r>
+              <a:rPr sz="1800" b="0" i="1">
+                <a:solidFill>
+                  <a:srgbClr val="E8EEF3"/>
+                </a:solidFill>
+                <a:latin typeface="Inter"/>
+              </a:rPr>
+              <a:t>把气候数据，变成茶农今天能执行的动作。</a:t>
+            </a:r>
+          </a:p>
+        </p:txBody>
+      </p:sp>
+      <p:sp>
+        <p:nvSpPr>
+          <p:cNvPr id="21" name="TextBox 20"/>
+          <p:cNvSpPr txBox="1"/>
+          <p:nvPr/>
+        </p:nvSpPr>
+        <p:spPr>
+          <a:xfrm>
+            <a:off x="868680" y="5989320"/>
+            <a:ext cx="10607040" cy="365760"/>
+          </a:xfrm>
+          <a:prstGeom prst="rect">
+            <a:avLst/>
+          </a:prstGeom>
+          <a:noFill/>
+        </p:spPr>
+        <p:txBody>
+          <a:bodyPr wrap="square">
+            <a:spAutoFit/>
+          </a:bodyPr>
+          <a:lstStyle/>
+          <a:p>
+            <a:pPr algn="l"/>
+            <a:r>
+              <a:rPr sz="1050" b="0" i="0">
+                <a:solidFill>
+                  <a:srgbClr val="9FB4C6"/>
+                </a:solidFill>
+                <a:latin typeface="Inter"/>
+              </a:rPr>
+              <a:t>Demo: teawindow.onrender.com ｜ Repo: github.com/Eric2007-sudo/TeaWindow ｜ Stage: prototype / demo available</a:t>
+            </a:r>
+          </a:p>
+        </p:txBody>
+      </p:sp>
     </p:spTree>
   </p:cSld>
   <p:clrMapOvr>
@@ -21982,700 +22687,30 @@
         <p:nvPr/>
       </p:nvGrpSpPr>
       <p:grpSpPr/>
-      <p:sp>
-        <p:nvSpPr>
-          <p:cNvPr id="2" name="Rectangle 1"/>
-          <p:cNvSpPr/>
+      <p:pic>
+        <p:nvPicPr>
+          <p:cNvPr id="2" name="Picture 1" descr="30_架构图_1plus5.png"/>
+          <p:cNvPicPr>
+            <a:picLocks noChangeAspect="1"/>
+          </p:cNvPicPr>
           <p:nvPr/>
-        </p:nvSpPr>
+        </p:nvPicPr>
+        <p:blipFill>
+          <a:blip r:embed="rId2"/>
+          <a:stretch>
+            <a:fillRect/>
+          </a:stretch>
+        </p:blipFill>
         <p:spPr>
           <a:xfrm>
             <a:off x="0" y="0"/>
-            <a:ext cx="12179808" cy="6858000"/>
-          </a:xfrm>
-          <a:prstGeom prst="rect">
-            <a:avLst/>
-          </a:prstGeom>
-          <a:solidFill>
-            <a:srgbClr val="0F1720"/>
-          </a:solidFill>
-          <a:ln>
-            <a:noFill/>
-          </a:ln>
-          <a:effectLst/>
-        </p:spPr>
-        <p:style>
-          <a:lnRef idx="1">
-            <a:schemeClr val="accent1"/>
-          </a:lnRef>
-          <a:fillRef idx="3">
-            <a:schemeClr val="accent1"/>
-          </a:fillRef>
-          <a:effectRef idx="2">
-            <a:schemeClr val="accent1"/>
-          </a:effectRef>
-          <a:fontRef idx="minor">
-            <a:schemeClr val="lt1"/>
-          </a:fontRef>
-        </p:style>
-        <p:txBody>
-          <a:bodyPr rtlCol="0" anchor="ctr"/>
-          <a:lstStyle/>
-          <a:p>
-            <a:pPr algn="ctr"/>
-          </a:p>
-        </p:txBody>
-      </p:sp>
-      <p:sp>
-        <p:nvSpPr>
-          <p:cNvPr id="3" name="Rectangle 2"/>
-          <p:cNvSpPr/>
-          <p:nvPr/>
-        </p:nvSpPr>
-        <p:spPr>
-          <a:xfrm>
-            <a:off x="640080" y="658368"/>
-            <a:ext cx="64008" cy="777240"/>
-          </a:xfrm>
-          <a:prstGeom prst="rect">
-            <a:avLst/>
-          </a:prstGeom>
-          <a:solidFill>
-            <a:srgbClr val="4AA8FF"/>
-          </a:solidFill>
-          <a:ln>
-            <a:noFill/>
-          </a:ln>
-          <a:effectLst/>
-        </p:spPr>
-        <p:style>
-          <a:lnRef idx="1">
-            <a:schemeClr val="accent1"/>
-          </a:lnRef>
-          <a:fillRef idx="3">
-            <a:schemeClr val="accent1"/>
-          </a:fillRef>
-          <a:effectRef idx="2">
-            <a:schemeClr val="accent1"/>
-          </a:effectRef>
-          <a:fontRef idx="minor">
-            <a:schemeClr val="lt1"/>
-          </a:fontRef>
-        </p:style>
-        <p:txBody>
-          <a:bodyPr rtlCol="0" anchor="ctr"/>
-          <a:lstStyle/>
-          <a:p>
-            <a:pPr algn="ctr"/>
-          </a:p>
-        </p:txBody>
-      </p:sp>
-      <p:sp>
-        <p:nvSpPr>
-          <p:cNvPr id="4" name="TextBox 3"/>
-          <p:cNvSpPr txBox="1"/>
-          <p:nvPr/>
-        </p:nvSpPr>
-        <p:spPr>
-          <a:xfrm>
-            <a:off x="868680" y="621792"/>
-            <a:ext cx="8229600" cy="640080"/>
-          </a:xfrm>
-          <a:prstGeom prst="rect">
-            <a:avLst/>
-          </a:prstGeom>
-          <a:noFill/>
-        </p:spPr>
-        <p:txBody>
-          <a:bodyPr wrap="square">
-            <a:spAutoFit/>
-          </a:bodyPr>
-          <a:lstStyle/>
-          <a:p>
-            <a:pPr algn="l"/>
-            <a:r>
-              <a:rPr sz="3000" b="1" i="0">
-                <a:solidFill>
-                  <a:srgbClr val="E8EEF3"/>
-                </a:solidFill>
-                <a:latin typeface="Montserrat"/>
-              </a:rPr>
-              <a:t>团队与背景</a:t>
-            </a:r>
-          </a:p>
-        </p:txBody>
-      </p:sp>
-      <p:sp>
-        <p:nvSpPr>
-          <p:cNvPr id="5" name="TextBox 4"/>
-          <p:cNvSpPr txBox="1"/>
-          <p:nvPr/>
-        </p:nvSpPr>
-        <p:spPr>
-          <a:xfrm>
-            <a:off x="868680" y="1481328"/>
-            <a:ext cx="5486400" cy="731520"/>
-          </a:xfrm>
-          <a:prstGeom prst="rect">
-            <a:avLst/>
-          </a:prstGeom>
-          <a:noFill/>
-        </p:spPr>
-        <p:txBody>
-          <a:bodyPr wrap="square">
-            <a:spAutoFit/>
-          </a:bodyPr>
-          <a:lstStyle/>
-          <a:p>
-            <a:pPr algn="l"/>
-            <a:r>
-              <a:rPr sz="4000" b="1" i="0">
-                <a:solidFill>
-                  <a:srgbClr val="E8EEF3"/>
-                </a:solidFill>
-                <a:latin typeface="Montserrat"/>
-              </a:rPr>
-              <a:t>叶子玄</a:t>
-            </a:r>
-          </a:p>
-        </p:txBody>
-      </p:sp>
-      <p:sp>
-        <p:nvSpPr>
-          <p:cNvPr id="6" name="TextBox 5"/>
-          <p:cNvSpPr txBox="1"/>
-          <p:nvPr/>
-        </p:nvSpPr>
-        <p:spPr>
-          <a:xfrm>
-            <a:off x="868680" y="2148840"/>
-            <a:ext cx="5486400" cy="365760"/>
-          </a:xfrm>
-          <a:prstGeom prst="rect">
-            <a:avLst/>
-          </a:prstGeom>
-          <a:noFill/>
-        </p:spPr>
-        <p:txBody>
-          <a:bodyPr wrap="square">
-            <a:spAutoFit/>
-          </a:bodyPr>
-          <a:lstStyle/>
-          <a:p>
-            <a:pPr algn="l"/>
-            <a:r>
-              <a:rPr sz="1800" b="0" i="0">
-                <a:solidFill>
-                  <a:srgbClr val="9FB4C6"/>
-                </a:solidFill>
-                <a:latin typeface="Montserrat"/>
-              </a:rPr>
-              <a:t>Ye Zixuan</a:t>
-            </a:r>
-          </a:p>
-        </p:txBody>
-      </p:sp>
-      <p:sp>
-        <p:nvSpPr>
-          <p:cNvPr id="7" name="TextBox 6"/>
-          <p:cNvSpPr txBox="1"/>
-          <p:nvPr/>
-        </p:nvSpPr>
-        <p:spPr>
-          <a:xfrm>
-            <a:off x="868680" y="2606040"/>
-            <a:ext cx="5669280" cy="457200"/>
-          </a:xfrm>
-          <a:prstGeom prst="rect">
-            <a:avLst/>
-          </a:prstGeom>
-          <a:noFill/>
-        </p:spPr>
-        <p:txBody>
-          <a:bodyPr wrap="square">
-            <a:spAutoFit/>
-          </a:bodyPr>
-          <a:lstStyle/>
-          <a:p>
-            <a:pPr algn="l"/>
-            <a:r>
-              <a:rPr sz="1600" b="0" i="0">
-                <a:solidFill>
-                  <a:srgbClr val="CED9E4"/>
-                </a:solidFill>
-                <a:latin typeface="Inter"/>
-              </a:rPr>
-              <a:t>浙江大学 · 计算机科学与技术（本科二年级）</a:t>
-            </a:r>
-          </a:p>
-        </p:txBody>
-      </p:sp>
-      <p:sp>
-        <p:nvSpPr>
-          <p:cNvPr id="8" name="TextBox 7"/>
-          <p:cNvSpPr txBox="1"/>
-          <p:nvPr/>
-        </p:nvSpPr>
-        <p:spPr>
-          <a:xfrm>
-            <a:off x="868680" y="3200400"/>
-            <a:ext cx="5669280" cy="365760"/>
-          </a:xfrm>
-          <a:prstGeom prst="rect">
-            <a:avLst/>
-          </a:prstGeom>
-          <a:noFill/>
-        </p:spPr>
-        <p:txBody>
-          <a:bodyPr wrap="square">
-            <a:spAutoFit/>
-          </a:bodyPr>
-          <a:lstStyle/>
-          <a:p>
-            <a:pPr algn="l"/>
-            <a:r>
-              <a:rPr sz="1350" b="0" i="0">
-                <a:solidFill>
-                  <a:srgbClr val="CED9E4"/>
-                </a:solidFill>
-                <a:latin typeface="Inter"/>
-              </a:rPr>
-              <a:t>角色：项目负责人 · 算法与全栈</a:t>
-            </a:r>
-          </a:p>
-        </p:txBody>
-      </p:sp>
-      <p:sp>
-        <p:nvSpPr>
-          <p:cNvPr id="9" name="TextBox 8"/>
-          <p:cNvSpPr txBox="1"/>
-          <p:nvPr/>
-        </p:nvSpPr>
-        <p:spPr>
-          <a:xfrm>
-            <a:off x="868680" y="3538728"/>
-            <a:ext cx="5669280" cy="365760"/>
-          </a:xfrm>
-          <a:prstGeom prst="rect">
-            <a:avLst/>
-          </a:prstGeom>
-          <a:noFill/>
-        </p:spPr>
-        <p:txBody>
-          <a:bodyPr wrap="square">
-            <a:spAutoFit/>
-          </a:bodyPr>
-          <a:lstStyle/>
-          <a:p>
-            <a:pPr algn="l"/>
-            <a:r>
-              <a:rPr sz="1350" b="0" i="0">
-                <a:solidFill>
-                  <a:srgbClr val="CED9E4"/>
-                </a:solidFill>
-                <a:latin typeface="Inter"/>
-              </a:rPr>
-              <a:t>团队：1 人（独立完成）· 19 岁</a:t>
-            </a:r>
-          </a:p>
-        </p:txBody>
-      </p:sp>
-      <p:sp>
-        <p:nvSpPr>
-          <p:cNvPr id="10" name="TextBox 9"/>
-          <p:cNvSpPr txBox="1"/>
-          <p:nvPr/>
-        </p:nvSpPr>
-        <p:spPr>
-          <a:xfrm>
-            <a:off x="868680" y="3877056"/>
-            <a:ext cx="5669280" cy="365760"/>
-          </a:xfrm>
-          <a:prstGeom prst="rect">
-            <a:avLst/>
-          </a:prstGeom>
-          <a:noFill/>
-        </p:spPr>
-        <p:txBody>
-          <a:bodyPr wrap="square">
-            <a:spAutoFit/>
-          </a:bodyPr>
-          <a:lstStyle/>
-          <a:p>
-            <a:pPr algn="l"/>
-            <a:r>
-              <a:rPr sz="1350" b="0" i="0">
-                <a:solidFill>
-                  <a:srgbClr val="CED9E4"/>
-                </a:solidFill>
-                <a:latin typeface="Inter"/>
-              </a:rPr>
-              <a:t>地点：中国 · 杭州</a:t>
-            </a:r>
-          </a:p>
-        </p:txBody>
-      </p:sp>
-      <p:sp>
-        <p:nvSpPr>
-          <p:cNvPr id="11" name="TextBox 10"/>
-          <p:cNvSpPr txBox="1"/>
-          <p:nvPr/>
-        </p:nvSpPr>
-        <p:spPr>
-          <a:xfrm>
-            <a:off x="868680" y="4215384"/>
-            <a:ext cx="5669280" cy="365760"/>
-          </a:xfrm>
-          <a:prstGeom prst="rect">
-            <a:avLst/>
-          </a:prstGeom>
-          <a:noFill/>
-        </p:spPr>
-        <p:txBody>
-          <a:bodyPr wrap="square">
-            <a:spAutoFit/>
-          </a:bodyPr>
-          <a:lstStyle/>
-          <a:p>
-            <a:pPr algn="l"/>
-            <a:r>
-              <a:rPr sz="1350" b="0" i="0">
-                <a:solidFill>
-                  <a:srgbClr val="CED9E4"/>
-                </a:solidFill>
-                <a:latin typeface="Inter"/>
-              </a:rPr>
-              <a:t>电话：+86 15858238044</a:t>
-            </a:r>
-          </a:p>
-        </p:txBody>
-      </p:sp>
-      <p:sp>
-        <p:nvSpPr>
-          <p:cNvPr id="12" name="TextBox 11"/>
-          <p:cNvSpPr txBox="1"/>
-          <p:nvPr/>
-        </p:nvSpPr>
-        <p:spPr>
-          <a:xfrm>
-            <a:off x="868680" y="4553712"/>
-            <a:ext cx="5669280" cy="365760"/>
-          </a:xfrm>
-          <a:prstGeom prst="rect">
-            <a:avLst/>
-          </a:prstGeom>
-          <a:noFill/>
-        </p:spPr>
-        <p:txBody>
-          <a:bodyPr wrap="square">
-            <a:spAutoFit/>
-          </a:bodyPr>
-          <a:lstStyle/>
-          <a:p>
-            <a:pPr algn="l"/>
-            <a:r>
-              <a:rPr sz="1350" b="0" i="0">
-                <a:solidFill>
-                  <a:srgbClr val="CED9E4"/>
-                </a:solidFill>
-                <a:latin typeface="Inter"/>
-              </a:rPr>
-              <a:t>邮箱：2302372846@qq.com</a:t>
-            </a:r>
-          </a:p>
-        </p:txBody>
-      </p:sp>
-      <p:sp>
-        <p:nvSpPr>
-          <p:cNvPr id="13" name="TextBox 12"/>
-          <p:cNvSpPr txBox="1"/>
-          <p:nvPr/>
-        </p:nvSpPr>
-        <p:spPr>
-          <a:xfrm>
-            <a:off x="868680" y="4892040"/>
-            <a:ext cx="5669280" cy="365760"/>
-          </a:xfrm>
-          <a:prstGeom prst="rect">
-            <a:avLst/>
-          </a:prstGeom>
-          <a:noFill/>
-        </p:spPr>
-        <p:txBody>
-          <a:bodyPr wrap="square">
-            <a:spAutoFit/>
-          </a:bodyPr>
-          <a:lstStyle/>
-          <a:p>
-            <a:pPr algn="l"/>
-            <a:r>
-              <a:rPr sz="1350" b="0" i="0">
-                <a:solidFill>
-                  <a:srgbClr val="CED9E4"/>
-                </a:solidFill>
-                <a:latin typeface="Inter"/>
-              </a:rPr>
-              <a:t>赛道：Track 01 · 梅家坞气候智慧茶园</a:t>
-            </a:r>
-          </a:p>
-        </p:txBody>
-      </p:sp>
-      <p:sp>
-        <p:nvSpPr>
-          <p:cNvPr id="14" name="Rectangle 13"/>
-          <p:cNvSpPr/>
-          <p:nvPr/>
-        </p:nvSpPr>
-        <p:spPr>
-          <a:xfrm>
-            <a:off x="6720840" y="1481328"/>
-            <a:ext cx="4800600" cy="3246120"/>
-          </a:xfrm>
-          <a:prstGeom prst="rect">
-            <a:avLst/>
-          </a:prstGeom>
-          <a:solidFill>
-            <a:srgbClr val="16212B"/>
-          </a:solidFill>
-          <a:ln w="9525">
-            <a:solidFill>
-              <a:srgbClr val="2B3D4D"/>
-            </a:solidFill>
-          </a:ln>
-          <a:effectLst/>
-        </p:spPr>
-        <p:style>
-          <a:lnRef idx="1">
-            <a:schemeClr val="accent1"/>
-          </a:lnRef>
-          <a:fillRef idx="3">
-            <a:schemeClr val="accent1"/>
-          </a:fillRef>
-          <a:effectRef idx="2">
-            <a:schemeClr val="accent1"/>
-          </a:effectRef>
-          <a:fontRef idx="minor">
-            <a:schemeClr val="lt1"/>
-          </a:fontRef>
-        </p:style>
-        <p:txBody>
-          <a:bodyPr rtlCol="0" anchor="ctr"/>
-          <a:lstStyle/>
-          <a:p>
-            <a:pPr algn="ctr"/>
-          </a:p>
-        </p:txBody>
-      </p:sp>
-      <p:sp>
-        <p:nvSpPr>
-          <p:cNvPr id="15" name="TextBox 14"/>
-          <p:cNvSpPr txBox="1"/>
-          <p:nvPr/>
-        </p:nvSpPr>
-        <p:spPr>
-          <a:xfrm>
-            <a:off x="6967728" y="1664208"/>
-            <a:ext cx="4389120" cy="365760"/>
-          </a:xfrm>
-          <a:prstGeom prst="rect">
-            <a:avLst/>
-          </a:prstGeom>
-          <a:noFill/>
-        </p:spPr>
-        <p:txBody>
-          <a:bodyPr wrap="square">
-            <a:spAutoFit/>
-          </a:bodyPr>
-          <a:lstStyle/>
-          <a:p>
-            <a:pPr algn="l"/>
-            <a:r>
-              <a:rPr sz="1600" b="1" i="0">
-                <a:solidFill>
-                  <a:srgbClr val="4AA8FF"/>
-                </a:solidFill>
-                <a:latin typeface="Inter"/>
-              </a:rPr>
-              <a:t>我为这个项目做了什么</a:t>
-            </a:r>
-          </a:p>
-        </p:txBody>
-      </p:sp>
-      <p:sp>
-        <p:nvSpPr>
-          <p:cNvPr id="16" name="TextBox 15"/>
-          <p:cNvSpPr txBox="1"/>
-          <p:nvPr/>
-        </p:nvSpPr>
-        <p:spPr>
-          <a:xfrm>
-            <a:off x="6967728" y="2148840"/>
-            <a:ext cx="4343400" cy="777240"/>
-          </a:xfrm>
-          <a:prstGeom prst="rect">
-            <a:avLst/>
-          </a:prstGeom>
-          <a:noFill/>
-        </p:spPr>
-        <p:txBody>
-          <a:bodyPr wrap="square">
-            <a:spAutoFit/>
-          </a:bodyPr>
-          <a:lstStyle/>
-          <a:p>
-            <a:pPr algn="l"/>
-            <a:r>
-              <a:rPr sz="1250" b="0" i="0">
-                <a:solidFill>
-                  <a:srgbClr val="CED9E4"/>
-                </a:solidFill>
-                <a:latin typeface="Inter"/>
-              </a:rPr>
-              <a:t>• 数据：ERA5 / MET Norway 双源、Sentinel-2、30m DEM 地形下推</a:t>
-            </a:r>
-          </a:p>
-        </p:txBody>
-      </p:sp>
-      <p:sp>
-        <p:nvSpPr>
-          <p:cNvPr id="17" name="TextBox 16"/>
-          <p:cNvSpPr txBox="1"/>
-          <p:nvPr/>
-        </p:nvSpPr>
-        <p:spPr>
-          <a:xfrm>
-            <a:off x="6967728" y="2971800"/>
-            <a:ext cx="4343400" cy="777240"/>
-          </a:xfrm>
-          <a:prstGeom prst="rect">
-            <a:avLst/>
-          </a:prstGeom>
-          <a:noFill/>
-        </p:spPr>
-        <p:txBody>
-          <a:bodyPr wrap="square">
-            <a:spAutoFit/>
-          </a:bodyPr>
-          <a:lstStyle/>
-          <a:p>
-            <a:pPr algn="l"/>
-            <a:r>
-              <a:rPr sz="1250" b="0" i="0">
-                <a:solidFill>
-                  <a:srgbClr val="CED9E4"/>
-                </a:solidFill>
-                <a:latin typeface="Inter"/>
-              </a:rPr>
-              <a:t>• 模型：numpy GBDT 复合风险；冻结评估集；官方开采日验证 1.8 天</a:t>
-            </a:r>
-          </a:p>
-        </p:txBody>
-      </p:sp>
-      <p:sp>
-        <p:nvSpPr>
-          <p:cNvPr id="18" name="TextBox 17"/>
-          <p:cNvSpPr txBox="1"/>
-          <p:nvPr/>
-        </p:nvSpPr>
-        <p:spPr>
-          <a:xfrm>
-            <a:off x="6967728" y="3794760"/>
-            <a:ext cx="4343400" cy="777240"/>
-          </a:xfrm>
-          <a:prstGeom prst="rect">
-            <a:avLst/>
-          </a:prstGeom>
-          <a:noFill/>
-        </p:spPr>
-        <p:txBody>
-          <a:bodyPr wrap="square">
-            <a:spAutoFit/>
-          </a:bodyPr>
-          <a:lstStyle/>
-          <a:p>
-            <a:pPr algn="l"/>
-            <a:r>
-              <a:rPr sz="1250" b="0" i="0">
-                <a:solidFill>
-                  <a:srgbClr val="CED9E4"/>
-                </a:solidFill>
-                <a:latin typeface="Inter"/>
-              </a:rPr>
-              <a:t>• 产品：在线 Demo、地块风险图、智能问答与 1+5 护栏、部署与监控</a:t>
-            </a:r>
-          </a:p>
-        </p:txBody>
-      </p:sp>
-      <p:sp>
-        <p:nvSpPr>
-          <p:cNvPr id="19" name="TextBox 18"/>
-          <p:cNvSpPr txBox="1"/>
-          <p:nvPr/>
-        </p:nvSpPr>
-        <p:spPr>
-          <a:xfrm>
-            <a:off x="868680" y="5257800"/>
-            <a:ext cx="10607040" cy="457200"/>
-          </a:xfrm>
-          <a:prstGeom prst="rect">
-            <a:avLst/>
-          </a:prstGeom>
-          <a:noFill/>
-        </p:spPr>
-        <p:txBody>
-          <a:bodyPr wrap="square">
-            <a:spAutoFit/>
-          </a:bodyPr>
-          <a:lstStyle/>
-          <a:p>
-            <a:pPr algn="l"/>
-            <a:r>
-              <a:rPr sz="1800" b="0" i="1">
-                <a:solidFill>
-                  <a:srgbClr val="E8EEF3"/>
-                </a:solidFill>
-                <a:latin typeface="Inter"/>
-              </a:rPr>
-              <a:t>把气候数据，变成茶农今天能执行的动作。</a:t>
-            </a:r>
-          </a:p>
-        </p:txBody>
-      </p:sp>
-      <p:sp>
-        <p:nvSpPr>
-          <p:cNvPr id="20" name="TextBox 19"/>
-          <p:cNvSpPr txBox="1"/>
-          <p:nvPr/>
-        </p:nvSpPr>
-        <p:spPr>
-          <a:xfrm>
-            <a:off x="868680" y="5989320"/>
-            <a:ext cx="10607040" cy="365760"/>
-          </a:xfrm>
-          <a:prstGeom prst="rect">
-            <a:avLst/>
-          </a:prstGeom>
-          <a:noFill/>
-        </p:spPr>
-        <p:txBody>
-          <a:bodyPr wrap="square">
-            <a:spAutoFit/>
-          </a:bodyPr>
-          <a:lstStyle/>
-          <a:p>
-            <a:pPr algn="l"/>
-            <a:r>
-              <a:rPr sz="1050" b="0" i="0">
-                <a:solidFill>
-                  <a:srgbClr val="9FB4C6"/>
-                </a:solidFill>
-                <a:latin typeface="Inter"/>
-              </a:rPr>
-              <a:t>Demo: teawindow.onrender.com ｜ Repo: github.com/Eric2007-sudo/TeaWindow ｜ Stage: prototype / demo available</a:t>
-            </a:r>
-          </a:p>
-        </p:txBody>
-      </p:sp>
+            <a:ext cx="12179300" cy="6858000"/>
+          </a:xfrm>
+          <a:prstGeom prst="rect">
+            <a:avLst/>
+          </a:prstGeom>
+        </p:spPr>
+      </p:pic>
     </p:spTree>
   </p:cSld>
   <p:clrMapOvr>

--- a/submit/02_TeaWindow_Pitch_CN_14p.pptx
+++ b/submit/02_TeaWindow_Pitch_CN_14p.pptx
@@ -22028,9 +22028,38 @@
           </a:p>
         </p:txBody>
       </p:sp>
-      <p:sp>
-        <p:nvSpPr>
-          <p:cNvPr id="4" name="TextBox 3"/>
+      <p:pic>
+        <p:nvPicPr>
+          <p:cNvPr id="4" name="Picture 3" descr="photo.jpg"/>
+          <p:cNvPicPr>
+            <a:picLocks noChangeAspect="1"/>
+          </p:cNvPicPr>
+          <p:nvPr/>
+        </p:nvPicPr>
+        <p:blipFill>
+          <a:blip r:embed="rId2"/>
+          <a:stretch>
+            <a:fillRect/>
+          </a:stretch>
+        </p:blipFill>
+        <p:spPr>
+          <a:xfrm>
+            <a:off x="868680" y="1463040"/>
+            <a:ext cx="1601093" cy="2240280"/>
+          </a:xfrm>
+          <a:prstGeom prst="rect">
+            <a:avLst/>
+          </a:prstGeom>
+          <a:ln w="15875">
+            <a:solidFill>
+              <a:srgbClr val="4AA8FF"/>
+            </a:solidFill>
+          </a:ln>
+        </p:spPr>
+      </p:pic>
+      <p:sp>
+        <p:nvSpPr>
+          <p:cNvPr id="5" name="TextBox 4"/>
           <p:cNvSpPr txBox="1"/>
           <p:nvPr/>
         </p:nvSpPr>
@@ -22065,14 +22094,14 @@
       </p:sp>
       <p:sp>
         <p:nvSpPr>
-          <p:cNvPr id="5" name="TextBox 4"/>
+          <p:cNvPr id="6" name="TextBox 5"/>
           <p:cNvSpPr txBox="1"/>
           <p:nvPr/>
         </p:nvSpPr>
         <p:spPr>
           <a:xfrm>
-            <a:off x="868680" y="1481328"/>
-            <a:ext cx="5486400" cy="731520"/>
+            <a:off x="2789813" y="1481328"/>
+            <a:ext cx="5120640" cy="731520"/>
           </a:xfrm>
           <a:prstGeom prst="rect">
             <a:avLst/>
@@ -22087,7 +22116,7 @@
           <a:p>
             <a:pPr algn="l"/>
             <a:r>
-              <a:rPr sz="4000" b="1" i="0">
+              <a:rPr sz="3800" b="1" i="0">
                 <a:solidFill>
                   <a:srgbClr val="E8EEF3"/>
                 </a:solidFill>
@@ -22100,14 +22129,14 @@
       </p:sp>
       <p:sp>
         <p:nvSpPr>
-          <p:cNvPr id="6" name="TextBox 5"/>
+          <p:cNvPr id="7" name="TextBox 6"/>
           <p:cNvSpPr txBox="1"/>
           <p:nvPr/>
         </p:nvSpPr>
         <p:spPr>
           <a:xfrm>
-            <a:off x="868680" y="2148840"/>
-            <a:ext cx="5486400" cy="365760"/>
+            <a:off x="2789813" y="2121408"/>
+            <a:ext cx="5120640" cy="365760"/>
           </a:xfrm>
           <a:prstGeom prst="rect">
             <a:avLst/>
@@ -22122,7 +22151,7 @@
           <a:p>
             <a:pPr algn="l"/>
             <a:r>
-              <a:rPr sz="1800" b="0" i="0">
+              <a:rPr sz="1700" b="0" i="0">
                 <a:solidFill>
                   <a:srgbClr val="9FB4C6"/>
                 </a:solidFill>
@@ -22135,14 +22164,14 @@
       </p:sp>
       <p:sp>
         <p:nvSpPr>
-          <p:cNvPr id="7" name="TextBox 6"/>
+          <p:cNvPr id="8" name="TextBox 7"/>
           <p:cNvSpPr txBox="1"/>
           <p:nvPr/>
         </p:nvSpPr>
         <p:spPr>
           <a:xfrm>
-            <a:off x="868680" y="2606040"/>
-            <a:ext cx="5669280" cy="457200"/>
+            <a:off x="2789813" y="2560320"/>
+            <a:ext cx="3794760" cy="731520"/>
           </a:xfrm>
           <a:prstGeom prst="rect">
             <a:avLst/>
@@ -22157,7 +22186,7 @@
           <a:p>
             <a:pPr algn="l"/>
             <a:r>
-              <a:rPr sz="1600" b="0" i="0">
+              <a:rPr sz="1350" b="0" i="0">
                 <a:solidFill>
                   <a:srgbClr val="CED9E4"/>
                 </a:solidFill>
@@ -22170,14 +22199,14 @@
       </p:sp>
       <p:sp>
         <p:nvSpPr>
-          <p:cNvPr id="8" name="TextBox 7"/>
+          <p:cNvPr id="9" name="TextBox 8"/>
           <p:cNvSpPr txBox="1"/>
           <p:nvPr/>
         </p:nvSpPr>
         <p:spPr>
           <a:xfrm>
-            <a:off x="868680" y="3200400"/>
-            <a:ext cx="5669280" cy="365760"/>
+            <a:off x="2789813" y="3218688"/>
+            <a:ext cx="3749039" cy="502920"/>
           </a:xfrm>
           <a:prstGeom prst="rect">
             <a:avLst/>
@@ -22192,7 +22221,7 @@
           <a:p>
             <a:pPr algn="l"/>
             <a:r>
-              <a:rPr sz="1350" b="0" i="0">
+              <a:rPr sz="1150" b="0" i="0">
                 <a:solidFill>
                   <a:srgbClr val="CED9E4"/>
                 </a:solidFill>
@@ -22205,14 +22234,14 @@
       </p:sp>
       <p:sp>
         <p:nvSpPr>
-          <p:cNvPr id="9" name="TextBox 8"/>
+          <p:cNvPr id="10" name="TextBox 9"/>
           <p:cNvSpPr txBox="1"/>
           <p:nvPr/>
         </p:nvSpPr>
         <p:spPr>
           <a:xfrm>
-            <a:off x="868680" y="3493008"/>
-            <a:ext cx="5669280" cy="365760"/>
+            <a:off x="2789813" y="3511296"/>
+            <a:ext cx="3749039" cy="502920"/>
           </a:xfrm>
           <a:prstGeom prst="rect">
             <a:avLst/>
@@ -22227,7 +22256,7 @@
           <a:p>
             <a:pPr algn="l"/>
             <a:r>
-              <a:rPr sz="1350" b="0" i="0">
+              <a:rPr sz="1150" b="0" i="0">
                 <a:solidFill>
                   <a:srgbClr val="CED9E4"/>
                 </a:solidFill>
@@ -22240,14 +22269,14 @@
       </p:sp>
       <p:sp>
         <p:nvSpPr>
-          <p:cNvPr id="10" name="TextBox 9"/>
+          <p:cNvPr id="11" name="TextBox 10"/>
           <p:cNvSpPr txBox="1"/>
           <p:nvPr/>
         </p:nvSpPr>
         <p:spPr>
           <a:xfrm>
-            <a:off x="868680" y="3785615"/>
-            <a:ext cx="5669280" cy="365760"/>
+            <a:off x="2789813" y="3803904"/>
+            <a:ext cx="3749039" cy="502920"/>
           </a:xfrm>
           <a:prstGeom prst="rect">
             <a:avLst/>
@@ -22262,7 +22291,7 @@
           <a:p>
             <a:pPr algn="l"/>
             <a:r>
-              <a:rPr sz="1350" b="0" i="0">
+              <a:rPr sz="1150" b="0" i="0">
                 <a:solidFill>
                   <a:srgbClr val="CED9E4"/>
                 </a:solidFill>
@@ -22275,14 +22304,14 @@
       </p:sp>
       <p:sp>
         <p:nvSpPr>
-          <p:cNvPr id="11" name="TextBox 10"/>
+          <p:cNvPr id="12" name="TextBox 11"/>
           <p:cNvSpPr txBox="1"/>
           <p:nvPr/>
         </p:nvSpPr>
         <p:spPr>
           <a:xfrm>
-            <a:off x="868680" y="4078224"/>
-            <a:ext cx="5669280" cy="365760"/>
+            <a:off x="2789813" y="4096512"/>
+            <a:ext cx="3749039" cy="502920"/>
           </a:xfrm>
           <a:prstGeom prst="rect">
             <a:avLst/>
@@ -22297,7 +22326,7 @@
           <a:p>
             <a:pPr algn="l"/>
             <a:r>
-              <a:rPr sz="1350" b="0" i="0">
+              <a:rPr sz="1150" b="0" i="0">
                 <a:solidFill>
                   <a:srgbClr val="CED9E4"/>
                 </a:solidFill>
@@ -22310,14 +22339,14 @@
       </p:sp>
       <p:sp>
         <p:nvSpPr>
-          <p:cNvPr id="12" name="TextBox 11"/>
+          <p:cNvPr id="13" name="TextBox 12"/>
           <p:cNvSpPr txBox="1"/>
           <p:nvPr/>
         </p:nvSpPr>
         <p:spPr>
           <a:xfrm>
-            <a:off x="868680" y="4370832"/>
-            <a:ext cx="5669280" cy="365760"/>
+            <a:off x="2789813" y="4389120"/>
+            <a:ext cx="3749039" cy="502920"/>
           </a:xfrm>
           <a:prstGeom prst="rect">
             <a:avLst/>
@@ -22332,7 +22361,7 @@
           <a:p>
             <a:pPr algn="l"/>
             <a:r>
-              <a:rPr sz="1350" b="0" i="0">
+              <a:rPr sz="1150" b="0" i="0">
                 <a:solidFill>
                   <a:srgbClr val="CED9E4"/>
                 </a:solidFill>
@@ -22345,14 +22374,14 @@
       </p:sp>
       <p:sp>
         <p:nvSpPr>
-          <p:cNvPr id="13" name="TextBox 12"/>
+          <p:cNvPr id="14" name="TextBox 13"/>
           <p:cNvSpPr txBox="1"/>
           <p:nvPr/>
         </p:nvSpPr>
         <p:spPr>
           <a:xfrm>
-            <a:off x="868680" y="4663440"/>
-            <a:ext cx="5669280" cy="365760"/>
+            <a:off x="2789813" y="4681728"/>
+            <a:ext cx="3749039" cy="502920"/>
           </a:xfrm>
           <a:prstGeom prst="rect">
             <a:avLst/>
@@ -22367,7 +22396,7 @@
           <a:p>
             <a:pPr algn="l"/>
             <a:r>
-              <a:rPr sz="1350" b="0" i="0">
+              <a:rPr sz="1150" b="0" i="0">
                 <a:solidFill>
                   <a:srgbClr val="CED9E4"/>
                 </a:solidFill>
@@ -22380,14 +22409,14 @@
       </p:sp>
       <p:sp>
         <p:nvSpPr>
-          <p:cNvPr id="14" name="TextBox 13"/>
+          <p:cNvPr id="15" name="TextBox 14"/>
           <p:cNvSpPr txBox="1"/>
           <p:nvPr/>
         </p:nvSpPr>
         <p:spPr>
           <a:xfrm>
-            <a:off x="868680" y="4956048"/>
-            <a:ext cx="5669280" cy="365760"/>
+            <a:off x="2789813" y="4974336"/>
+            <a:ext cx="3749039" cy="502920"/>
           </a:xfrm>
           <a:prstGeom prst="rect">
             <a:avLst/>
@@ -22402,7 +22431,7 @@
           <a:p>
             <a:pPr algn="l"/>
             <a:r>
-              <a:rPr sz="1350" b="0" i="0">
+              <a:rPr sz="1150" b="0" i="0">
                 <a:solidFill>
                   <a:srgbClr val="CED9E4"/>
                 </a:solidFill>
@@ -22415,7 +22444,7 @@
       </p:sp>
       <p:sp>
         <p:nvSpPr>
-          <p:cNvPr id="15" name="Rectangle 14"/>
+          <p:cNvPr id="16" name="Rectangle 15"/>
           <p:cNvSpPr/>
           <p:nvPr/>
         </p:nvSpPr>
@@ -22461,7 +22490,7 @@
       </p:sp>
       <p:sp>
         <p:nvSpPr>
-          <p:cNvPr id="16" name="TextBox 15"/>
+          <p:cNvPr id="17" name="TextBox 16"/>
           <p:cNvSpPr txBox="1"/>
           <p:nvPr/>
         </p:nvSpPr>
@@ -22496,7 +22525,7 @@
       </p:sp>
       <p:sp>
         <p:nvSpPr>
-          <p:cNvPr id="17" name="TextBox 16"/>
+          <p:cNvPr id="18" name="TextBox 17"/>
           <p:cNvSpPr txBox="1"/>
           <p:nvPr/>
         </p:nvSpPr>
@@ -22531,7 +22560,7 @@
       </p:sp>
       <p:sp>
         <p:nvSpPr>
-          <p:cNvPr id="18" name="TextBox 17"/>
+          <p:cNvPr id="19" name="TextBox 18"/>
           <p:cNvSpPr txBox="1"/>
           <p:nvPr/>
         </p:nvSpPr>
@@ -22566,7 +22595,7 @@
       </p:sp>
       <p:sp>
         <p:nvSpPr>
-          <p:cNvPr id="19" name="TextBox 18"/>
+          <p:cNvPr id="20" name="TextBox 19"/>
           <p:cNvSpPr txBox="1"/>
           <p:nvPr/>
         </p:nvSpPr>
@@ -22601,7 +22630,7 @@
       </p:sp>
       <p:sp>
         <p:nvSpPr>
-          <p:cNvPr id="20" name="TextBox 19"/>
+          <p:cNvPr id="21" name="TextBox 20"/>
           <p:cNvSpPr txBox="1"/>
           <p:nvPr/>
         </p:nvSpPr>
@@ -22636,14 +22665,14 @@
       </p:sp>
       <p:sp>
         <p:nvSpPr>
-          <p:cNvPr id="21" name="TextBox 20"/>
+          <p:cNvPr id="22" name="TextBox 21"/>
           <p:cNvSpPr txBox="1"/>
           <p:nvPr/>
         </p:nvSpPr>
         <p:spPr>
           <a:xfrm>
-            <a:off x="868680" y="5989320"/>
-            <a:ext cx="10607040" cy="365760"/>
+            <a:off x="868680" y="6035040"/>
+            <a:ext cx="10789920" cy="365760"/>
           </a:xfrm>
           <a:prstGeom prst="rect">
             <a:avLst/>
@@ -22658,7 +22687,7 @@
           <a:p>
             <a:pPr algn="l"/>
             <a:r>
-              <a:rPr sz="1050" b="0" i="0">
+              <a:rPr sz="950" b="0" i="0">
                 <a:solidFill>
                   <a:srgbClr val="9FB4C6"/>
                 </a:solidFill>
